--- a/tests/fixtures/powerpoint/entrance-animation.pptx
+++ b/tests/fixtures/powerpoint/entrance-animation.pptx
@@ -7,6 +7,7 @@
   <p:sldIdLst>
     <p:sldId id="256" r:id="rId2"/>
     <p:sldId id="257" r:id="rId3"/>
+    <p:sldId id="258" r:id="rId4"/>
   </p:sldIdLst>
   <p:sldSz cx="12192000" cy="6858000"/>
   <p:notesSz cx="6858000" cy="9144000"/>
@@ -290,7 +291,7 @@
     </p:spTree>
     <p:extLst>
       <p:ext uri="{BB962C8B-B14F-4D97-AF65-F5344CB8AC3E}">
-        <p14:creationId xmlns:p14="http://schemas.microsoft.com/office/powerpoint/2010/main" val="3872216922"/>
+        <p14:creationId xmlns:p14="http://schemas.microsoft.com/office/powerpoint/2010/main" val="3450085568"/>
       </p:ext>
     </p:extLst>
   </p:cSld>
@@ -460,7 +461,7 @@
     </p:spTree>
     <p:extLst>
       <p:ext uri="{BB962C8B-B14F-4D97-AF65-F5344CB8AC3E}">
-        <p14:creationId xmlns:p14="http://schemas.microsoft.com/office/powerpoint/2010/main" val="523360413"/>
+        <p14:creationId xmlns:p14="http://schemas.microsoft.com/office/powerpoint/2010/main" val="2546295063"/>
       </p:ext>
     </p:extLst>
   </p:cSld>
@@ -640,7 +641,7 @@
     </p:spTree>
     <p:extLst>
       <p:ext uri="{BB962C8B-B14F-4D97-AF65-F5344CB8AC3E}">
-        <p14:creationId xmlns:p14="http://schemas.microsoft.com/office/powerpoint/2010/main" val="4219303706"/>
+        <p14:creationId xmlns:p14="http://schemas.microsoft.com/office/powerpoint/2010/main" val="669113982"/>
       </p:ext>
     </p:extLst>
   </p:cSld>
@@ -672,7 +673,7 @@
           <p:cNvPr id="2" name="Title 1">
             <a:extLst>
               <a:ext uri="{FF2B5EF4-FFF2-40B4-BE49-F238E27FC236}">
-                <a16:creationId xmlns:a16="http://schemas.microsoft.com/office/drawing/2014/main" id="{B9D5994A-1449-FC58-6364-9E5AF8B79499}"/>
+                <a16:creationId xmlns:a16="http://schemas.microsoft.com/office/drawing/2014/main" id="{15C73A27-DEA8-E9F9-BA3A-1B1929EF8DE4}"/>
               </a:ext>
             </a:extLst>
           </p:cNvPr>
@@ -701,7 +702,7 @@
           <p:cNvPr id="3" name="Text Placeholder 2">
             <a:extLst>
               <a:ext uri="{FF2B5EF4-FFF2-40B4-BE49-F238E27FC236}">
-                <a16:creationId xmlns:a16="http://schemas.microsoft.com/office/drawing/2014/main" id="{279B09D4-A148-82EE-5A7E-DB9AB2298403}"/>
+                <a16:creationId xmlns:a16="http://schemas.microsoft.com/office/drawing/2014/main" id="{490CA550-3331-30AD-5F0F-26632FD2D10B}"/>
               </a:ext>
             </a:extLst>
           </p:cNvPr>
@@ -759,7 +760,7 @@
           <p:cNvPr id="4" name="Date Placeholder 3">
             <a:extLst>
               <a:ext uri="{FF2B5EF4-FFF2-40B4-BE49-F238E27FC236}">
-                <a16:creationId xmlns:a16="http://schemas.microsoft.com/office/drawing/2014/main" id="{DCA589F5-BAB6-D789-093E-839486093A59}"/>
+                <a16:creationId xmlns:a16="http://schemas.microsoft.com/office/drawing/2014/main" id="{7F5CCEA2-9598-C6F4-EB7E-140438B52530}"/>
               </a:ext>
             </a:extLst>
           </p:cNvPr>
@@ -788,7 +789,7 @@
           <p:cNvPr id="5" name="Footer Placeholder 4">
             <a:extLst>
               <a:ext uri="{FF2B5EF4-FFF2-40B4-BE49-F238E27FC236}">
-                <a16:creationId xmlns:a16="http://schemas.microsoft.com/office/drawing/2014/main" id="{875300BC-013A-B402-AE42-F12DAD489618}"/>
+                <a16:creationId xmlns:a16="http://schemas.microsoft.com/office/drawing/2014/main" id="{4F9AB277-5606-ABD0-BB14-5B4D8C6BC81A}"/>
               </a:ext>
             </a:extLst>
           </p:cNvPr>
@@ -813,7 +814,7 @@
           <p:cNvPr id="6" name="Slide Number Placeholder 5">
             <a:extLst>
               <a:ext uri="{FF2B5EF4-FFF2-40B4-BE49-F238E27FC236}">
-                <a16:creationId xmlns:a16="http://schemas.microsoft.com/office/drawing/2014/main" id="{A28127B9-237D-4948-06D9-253EC5A6323D}"/>
+                <a16:creationId xmlns:a16="http://schemas.microsoft.com/office/drawing/2014/main" id="{B5F03A16-0824-77B2-238F-626CCE95F6A3}"/>
               </a:ext>
             </a:extLst>
           </p:cNvPr>
@@ -840,7 +841,7 @@
     </p:spTree>
     <p:extLst>
       <p:ext uri="{BB962C8B-B14F-4D97-AF65-F5344CB8AC3E}">
-        <p14:creationId xmlns:p14="http://schemas.microsoft.com/office/powerpoint/2010/main" val="3499233263"/>
+        <p14:creationId xmlns:p14="http://schemas.microsoft.com/office/powerpoint/2010/main" val="3882989719"/>
       </p:ext>
     </p:extLst>
   </p:cSld>
@@ -1010,7 +1011,7 @@
     </p:spTree>
     <p:extLst>
       <p:ext uri="{BB962C8B-B14F-4D97-AF65-F5344CB8AC3E}">
-        <p14:creationId xmlns:p14="http://schemas.microsoft.com/office/powerpoint/2010/main" val="1358642600"/>
+        <p14:creationId xmlns:p14="http://schemas.microsoft.com/office/powerpoint/2010/main" val="2474269428"/>
       </p:ext>
     </p:extLst>
   </p:cSld>
@@ -1256,7 +1257,7 @@
     </p:spTree>
     <p:extLst>
       <p:ext uri="{BB962C8B-B14F-4D97-AF65-F5344CB8AC3E}">
-        <p14:creationId xmlns:p14="http://schemas.microsoft.com/office/powerpoint/2010/main" val="4055478782"/>
+        <p14:creationId xmlns:p14="http://schemas.microsoft.com/office/powerpoint/2010/main" val="1443880296"/>
       </p:ext>
     </p:extLst>
   </p:cSld>
@@ -1488,7 +1489,7 @@
     </p:spTree>
     <p:extLst>
       <p:ext uri="{BB962C8B-B14F-4D97-AF65-F5344CB8AC3E}">
-        <p14:creationId xmlns:p14="http://schemas.microsoft.com/office/powerpoint/2010/main" val="2994819977"/>
+        <p14:creationId xmlns:p14="http://schemas.microsoft.com/office/powerpoint/2010/main" val="3733248032"/>
       </p:ext>
     </p:extLst>
   </p:cSld>
@@ -1855,7 +1856,7 @@
     </p:spTree>
     <p:extLst>
       <p:ext uri="{BB962C8B-B14F-4D97-AF65-F5344CB8AC3E}">
-        <p14:creationId xmlns:p14="http://schemas.microsoft.com/office/powerpoint/2010/main" val="697497651"/>
+        <p14:creationId xmlns:p14="http://schemas.microsoft.com/office/powerpoint/2010/main" val="1890405053"/>
       </p:ext>
     </p:extLst>
   </p:cSld>
@@ -1973,7 +1974,7 @@
     </p:spTree>
     <p:extLst>
       <p:ext uri="{BB962C8B-B14F-4D97-AF65-F5344CB8AC3E}">
-        <p14:creationId xmlns:p14="http://schemas.microsoft.com/office/powerpoint/2010/main" val="2843630779"/>
+        <p14:creationId xmlns:p14="http://schemas.microsoft.com/office/powerpoint/2010/main" val="1400109989"/>
       </p:ext>
     </p:extLst>
   </p:cSld>
@@ -2068,7 +2069,7 @@
     </p:spTree>
     <p:extLst>
       <p:ext uri="{BB962C8B-B14F-4D97-AF65-F5344CB8AC3E}">
-        <p14:creationId xmlns:p14="http://schemas.microsoft.com/office/powerpoint/2010/main" val="1613168516"/>
+        <p14:creationId xmlns:p14="http://schemas.microsoft.com/office/powerpoint/2010/main" val="2287669266"/>
       </p:ext>
     </p:extLst>
   </p:cSld>
@@ -2345,7 +2346,7 @@
     </p:spTree>
     <p:extLst>
       <p:ext uri="{BB962C8B-B14F-4D97-AF65-F5344CB8AC3E}">
-        <p14:creationId xmlns:p14="http://schemas.microsoft.com/office/powerpoint/2010/main" val="1595326486"/>
+        <p14:creationId xmlns:p14="http://schemas.microsoft.com/office/powerpoint/2010/main" val="1356381975"/>
       </p:ext>
     </p:extLst>
   </p:cSld>
@@ -2598,7 +2599,7 @@
     </p:spTree>
     <p:extLst>
       <p:ext uri="{BB962C8B-B14F-4D97-AF65-F5344CB8AC3E}">
-        <p14:creationId xmlns:p14="http://schemas.microsoft.com/office/powerpoint/2010/main" val="595065877"/>
+        <p14:creationId xmlns:p14="http://schemas.microsoft.com/office/powerpoint/2010/main" val="3364450704"/>
       </p:ext>
     </p:extLst>
   </p:cSld>
@@ -2847,7 +2848,7 @@
     </p:spTree>
     <p:extLst>
       <p:ext uri="{BB962C8B-B14F-4D97-AF65-F5344CB8AC3E}">
-        <p14:creationId xmlns:p14="http://schemas.microsoft.com/office/powerpoint/2010/main" val="1361893704"/>
+        <p14:creationId xmlns:p14="http://schemas.microsoft.com/office/powerpoint/2010/main" val="3435067947"/>
       </p:ext>
     </p:extLst>
   </p:cSld>
@@ -3171,7 +3172,7 @@
           <p:cNvPr id="2" name="Title 1">
             <a:extLst>
               <a:ext uri="{FF2B5EF4-FFF2-40B4-BE49-F238E27FC236}">
-                <a16:creationId xmlns:a16="http://schemas.microsoft.com/office/drawing/2014/main" id="{A9FE106C-F89A-7EF9-E0FF-C3B18943A066}"/>
+                <a16:creationId xmlns:a16="http://schemas.microsoft.com/office/drawing/2014/main" id="{814FC86E-8BF5-31A9-1F61-0200CA155F54}"/>
               </a:ext>
             </a:extLst>
           </p:cNvPr>
@@ -3200,7 +3201,7 @@
           <p:cNvPr id="3" name="Text Placeholder 2">
             <a:extLst>
               <a:ext uri="{FF2B5EF4-FFF2-40B4-BE49-F238E27FC236}">
-                <a16:creationId xmlns:a16="http://schemas.microsoft.com/office/drawing/2014/main" id="{6155B10C-1E7A-9620-81DF-825DAC39E25C}"/>
+                <a16:creationId xmlns:a16="http://schemas.microsoft.com/office/drawing/2014/main" id="{B8608F27-931B-5E72-25E9-7D6C5ED82845}"/>
               </a:ext>
             </a:extLst>
           </p:cNvPr>
@@ -3380,7 +3381,7 @@
           <p:cNvPr id="2" name="Title 1">
             <a:extLst>
               <a:ext uri="{FF2B5EF4-FFF2-40B4-BE49-F238E27FC236}">
-                <a16:creationId xmlns:a16="http://schemas.microsoft.com/office/drawing/2014/main" id="{47ED1352-6469-D8E3-F4F3-D7630ACB5D36}"/>
+                <a16:creationId xmlns:a16="http://schemas.microsoft.com/office/drawing/2014/main" id="{DB0F5597-C92A-FF4D-F888-78148BCBB535}"/>
               </a:ext>
             </a:extLst>
           </p:cNvPr>
@@ -3409,7 +3410,7 @@
           <p:cNvPr id="3" name="TextBox 2">
             <a:extLst>
               <a:ext uri="{FF2B5EF4-FFF2-40B4-BE49-F238E27FC236}">
-                <a16:creationId xmlns:a16="http://schemas.microsoft.com/office/drawing/2014/main" id="{15A0AC94-D53B-66DA-B2E7-EB101A7D7192}"/>
+                <a16:creationId xmlns:a16="http://schemas.microsoft.com/office/drawing/2014/main" id="{57AC730F-C938-AD52-5287-730EBA56C9A5}"/>
               </a:ext>
             </a:extLst>
           </p:cNvPr>
@@ -3445,7 +3446,7 @@
           <p:cNvPr id="4" name="TextBox 3">
             <a:extLst>
               <a:ext uri="{FF2B5EF4-FFF2-40B4-BE49-F238E27FC236}">
-                <a16:creationId xmlns:a16="http://schemas.microsoft.com/office/drawing/2014/main" id="{FE44B364-2D18-576F-EAA4-CA0AC4803163}"/>
+                <a16:creationId xmlns:a16="http://schemas.microsoft.com/office/drawing/2014/main" id="{E0E04613-8350-25F9-4654-84459A0F9045}"/>
               </a:ext>
             </a:extLst>
           </p:cNvPr>
@@ -3481,7 +3482,7 @@
           <p:cNvPr id="5" name="TextBox 4">
             <a:extLst>
               <a:ext uri="{FF2B5EF4-FFF2-40B4-BE49-F238E27FC236}">
-                <a16:creationId xmlns:a16="http://schemas.microsoft.com/office/drawing/2014/main" id="{BF8E931D-2999-81F4-AF4E-10FBD3F4B6A7}"/>
+                <a16:creationId xmlns:a16="http://schemas.microsoft.com/office/drawing/2014/main" id="{0EAED4CE-8C7E-69C5-E8D0-FFAA06A299F7}"/>
               </a:ext>
             </a:extLst>
           </p:cNvPr>
@@ -3693,6 +3694,384 @@
       <p:bldP spid="3" grpId="0"/>
       <p:bldP spid="4" grpId="0"/>
       <p:bldP spid="5" grpId="0"/>
+    </p:bldLst>
+  </p:timing>
+</p:sld>
+</file>
+
+<file path=ppt/slides/slide3.xml><?xml version="1.0" encoding="utf-8"?>
+<p:sld xmlns:a="http://schemas.openxmlformats.org/drawingml/2006/main" xmlns:r="http://schemas.openxmlformats.org/officeDocument/2006/relationships" xmlns:p="http://schemas.openxmlformats.org/presentationml/2006/main">
+  <p:cSld>
+    <p:spTree>
+      <p:nvGrpSpPr>
+        <p:cNvPr id="1" name=""/>
+        <p:cNvGrpSpPr/>
+        <p:nvPr/>
+      </p:nvGrpSpPr>
+      <p:grpSpPr>
+        <a:xfrm>
+          <a:off x="0" y="0"/>
+          <a:ext cx="0" cy="0"/>
+          <a:chOff x="0" y="0"/>
+          <a:chExt cx="0" cy="0"/>
+        </a:xfrm>
+      </p:grpSpPr>
+      <p:sp>
+        <p:nvSpPr>
+          <p:cNvPr id="2" name="Title 1">
+            <a:extLst>
+              <a:ext uri="{FF2B5EF4-FFF2-40B4-BE49-F238E27FC236}">
+                <a16:creationId xmlns:a16="http://schemas.microsoft.com/office/drawing/2014/main" id="{5165017D-9849-9B7A-594E-CC17F1238BBB}"/>
+              </a:ext>
+            </a:extLst>
+          </p:cNvPr>
+          <p:cNvSpPr>
+            <a:spLocks noGrp="1"/>
+          </p:cNvSpPr>
+          <p:nvPr>
+            <p:ph type="title"/>
+          </p:nvPr>
+        </p:nvSpPr>
+        <p:spPr/>
+        <p:txBody>
+          <a:bodyPr/>
+          <a:lstStyle/>
+          <a:p>
+            <a:r>
+              <a:rPr lang="en-US"/>
+              <a:t>Two steps of two</a:t>
+            </a:r>
+            <a:endParaRPr lang="en-DE"/>
+          </a:p>
+        </p:txBody>
+      </p:sp>
+      <p:sp>
+        <p:nvSpPr>
+          <p:cNvPr id="3" name="TextBox 2">
+            <a:extLst>
+              <a:ext uri="{FF2B5EF4-FFF2-40B4-BE49-F238E27FC236}">
+                <a16:creationId xmlns:a16="http://schemas.microsoft.com/office/drawing/2014/main" id="{C4478140-B290-FA82-570E-D611B8508C53}"/>
+              </a:ext>
+            </a:extLst>
+          </p:cNvPr>
+          <p:cNvSpPr txBox="1"/>
+          <p:nvPr/>
+        </p:nvSpPr>
+        <p:spPr>
+          <a:xfrm>
+            <a:off x="762000" y="1905000"/>
+            <a:ext cx="3810000" cy="762000"/>
+          </a:xfrm>
+          <a:prstGeom prst="rect">
+            <a:avLst/>
+          </a:prstGeom>
+          <a:noFill/>
+        </p:spPr>
+        <p:txBody>
+          <a:bodyPr vert="horz" rtlCol="0">
+            <a:spAutoFit/>
+          </a:bodyPr>
+          <a:lstStyle/>
+          <a:p>
+            <a:r>
+              <a:rPr lang="en-US"/>
+              <a:t>One</a:t>
+            </a:r>
+            <a:endParaRPr lang="en-DE"/>
+          </a:p>
+        </p:txBody>
+      </p:sp>
+      <p:sp>
+        <p:nvSpPr>
+          <p:cNvPr id="4" name="TextBox 3">
+            <a:extLst>
+              <a:ext uri="{FF2B5EF4-FFF2-40B4-BE49-F238E27FC236}">
+                <a16:creationId xmlns:a16="http://schemas.microsoft.com/office/drawing/2014/main" id="{3AA1B4B4-466B-C58F-E387-6CFD64F18001}"/>
+              </a:ext>
+            </a:extLst>
+          </p:cNvPr>
+          <p:cNvSpPr txBox="1"/>
+          <p:nvPr/>
+        </p:nvSpPr>
+        <p:spPr>
+          <a:xfrm>
+            <a:off x="762000" y="2667000"/>
+            <a:ext cx="3810000" cy="762000"/>
+          </a:xfrm>
+          <a:prstGeom prst="rect">
+            <a:avLst/>
+          </a:prstGeom>
+          <a:noFill/>
+        </p:spPr>
+        <p:txBody>
+          <a:bodyPr vert="horz" rtlCol="0">
+            <a:spAutoFit/>
+          </a:bodyPr>
+          <a:lstStyle/>
+          <a:p>
+            <a:r>
+              <a:rPr lang="en-US"/>
+              <a:t>Two</a:t>
+            </a:r>
+            <a:endParaRPr lang="en-DE"/>
+          </a:p>
+        </p:txBody>
+      </p:sp>
+      <p:sp>
+        <p:nvSpPr>
+          <p:cNvPr id="5" name="TextBox 4">
+            <a:extLst>
+              <a:ext uri="{FF2B5EF4-FFF2-40B4-BE49-F238E27FC236}">
+                <a16:creationId xmlns:a16="http://schemas.microsoft.com/office/drawing/2014/main" id="{79FFBDDF-8D61-2190-E215-FF7F0A17747E}"/>
+              </a:ext>
+            </a:extLst>
+          </p:cNvPr>
+          <p:cNvSpPr txBox="1"/>
+          <p:nvPr/>
+        </p:nvSpPr>
+        <p:spPr>
+          <a:xfrm>
+            <a:off x="762000" y="3429000"/>
+            <a:ext cx="3810000" cy="762000"/>
+          </a:xfrm>
+          <a:prstGeom prst="rect">
+            <a:avLst/>
+          </a:prstGeom>
+          <a:noFill/>
+        </p:spPr>
+        <p:txBody>
+          <a:bodyPr vert="horz" rtlCol="0">
+            <a:spAutoFit/>
+          </a:bodyPr>
+          <a:lstStyle/>
+          <a:p>
+            <a:r>
+              <a:rPr lang="en-US"/>
+              <a:t>Three</a:t>
+            </a:r>
+            <a:endParaRPr lang="en-DE"/>
+          </a:p>
+        </p:txBody>
+      </p:sp>
+      <p:sp>
+        <p:nvSpPr>
+          <p:cNvPr id="6" name="TextBox 5">
+            <a:extLst>
+              <a:ext uri="{FF2B5EF4-FFF2-40B4-BE49-F238E27FC236}">
+                <a16:creationId xmlns:a16="http://schemas.microsoft.com/office/drawing/2014/main" id="{F60AF441-E189-D866-30E5-44EF7456D41D}"/>
+              </a:ext>
+            </a:extLst>
+          </p:cNvPr>
+          <p:cNvSpPr txBox="1"/>
+          <p:nvPr/>
+        </p:nvSpPr>
+        <p:spPr>
+          <a:xfrm>
+            <a:off x="762000" y="4191000"/>
+            <a:ext cx="3810000" cy="762000"/>
+          </a:xfrm>
+          <a:prstGeom prst="rect">
+            <a:avLst/>
+          </a:prstGeom>
+          <a:noFill/>
+        </p:spPr>
+        <p:txBody>
+          <a:bodyPr vert="horz" rtlCol="0">
+            <a:spAutoFit/>
+          </a:bodyPr>
+          <a:lstStyle/>
+          <a:p>
+            <a:r>
+              <a:rPr lang="en-US"/>
+              <a:t>Four</a:t>
+            </a:r>
+            <a:endParaRPr lang="en-DE"/>
+          </a:p>
+        </p:txBody>
+      </p:sp>
+    </p:spTree>
+  </p:cSld>
+  <p:clrMapOvr>
+    <a:masterClrMapping/>
+  </p:clrMapOvr>
+  <p:timing>
+    <p:tnLst>
+      <p:par>
+        <p:cTn id="1" dur="indefinite" restart="never" nodeType="tmRoot">
+          <p:childTnLst>
+            <p:seq concurrent="1" nextAc="seek">
+              <p:cTn id="2" dur="indefinite" nodeType="mainSeq">
+                <p:childTnLst>
+                  <p:par>
+                    <p:cTn id="3" fill="hold">
+                      <p:stCondLst>
+                        <p:cond delay="indefinite"/>
+                      </p:stCondLst>
+                      <p:childTnLst>
+                        <p:par>
+                          <p:cTn id="4" fill="hold">
+                            <p:stCondLst>
+                              <p:cond delay="0"/>
+                            </p:stCondLst>
+                            <p:childTnLst>
+                              <p:par>
+                                <p:cTn id="5" presetID="1" presetClass="entr" presetSubtype="0" fill="hold" grpId="0" nodeType="clickEffect">
+                                  <p:stCondLst>
+                                    <p:cond delay="0"/>
+                                  </p:stCondLst>
+                                  <p:childTnLst>
+                                    <p:set>
+                                      <p:cBhvr>
+                                        <p:cTn id="6" dur="1" fill="hold">
+                                          <p:stCondLst>
+                                            <p:cond delay="0"/>
+                                          </p:stCondLst>
+                                        </p:cTn>
+                                        <p:tgtEl>
+                                          <p:spTgt spid="3"/>
+                                        </p:tgtEl>
+                                        <p:attrNameLst>
+                                          <p:attrName>style.visibility</p:attrName>
+                                        </p:attrNameLst>
+                                      </p:cBhvr>
+                                      <p:to>
+                                        <p:strVal val="visible"/>
+                                      </p:to>
+                                    </p:set>
+                                  </p:childTnLst>
+                                </p:cTn>
+                              </p:par>
+                              <p:par>
+                                <p:cTn id="7" presetID="1" presetClass="entr" presetSubtype="0" fill="hold" grpId="0" nodeType="withEffect">
+                                  <p:stCondLst>
+                                    <p:cond delay="0"/>
+                                  </p:stCondLst>
+                                  <p:childTnLst>
+                                    <p:set>
+                                      <p:cBhvr>
+                                        <p:cTn id="8" dur="1" fill="hold">
+                                          <p:stCondLst>
+                                            <p:cond delay="0"/>
+                                          </p:stCondLst>
+                                        </p:cTn>
+                                        <p:tgtEl>
+                                          <p:spTgt spid="4"/>
+                                        </p:tgtEl>
+                                        <p:attrNameLst>
+                                          <p:attrName>style.visibility</p:attrName>
+                                        </p:attrNameLst>
+                                      </p:cBhvr>
+                                      <p:to>
+                                        <p:strVal val="visible"/>
+                                      </p:to>
+                                    </p:set>
+                                  </p:childTnLst>
+                                </p:cTn>
+                              </p:par>
+                            </p:childTnLst>
+                          </p:cTn>
+                        </p:par>
+                      </p:childTnLst>
+                    </p:cTn>
+                  </p:par>
+                  <p:par>
+                    <p:cTn id="9" fill="hold">
+                      <p:stCondLst>
+                        <p:cond delay="indefinite"/>
+                      </p:stCondLst>
+                      <p:childTnLst>
+                        <p:par>
+                          <p:cTn id="10" fill="hold">
+                            <p:stCondLst>
+                              <p:cond delay="0"/>
+                            </p:stCondLst>
+                            <p:childTnLst>
+                              <p:par>
+                                <p:cTn id="11" presetID="1" presetClass="entr" presetSubtype="0" fill="hold" grpId="0" nodeType="clickEffect">
+                                  <p:stCondLst>
+                                    <p:cond delay="0"/>
+                                  </p:stCondLst>
+                                  <p:childTnLst>
+                                    <p:set>
+                                      <p:cBhvr>
+                                        <p:cTn id="12" dur="1" fill="hold">
+                                          <p:stCondLst>
+                                            <p:cond delay="0"/>
+                                          </p:stCondLst>
+                                        </p:cTn>
+                                        <p:tgtEl>
+                                          <p:spTgt spid="5"/>
+                                        </p:tgtEl>
+                                        <p:attrNameLst>
+                                          <p:attrName>style.visibility</p:attrName>
+                                        </p:attrNameLst>
+                                      </p:cBhvr>
+                                      <p:to>
+                                        <p:strVal val="visible"/>
+                                      </p:to>
+                                    </p:set>
+                                  </p:childTnLst>
+                                </p:cTn>
+                              </p:par>
+                              <p:par>
+                                <p:cTn id="13" presetID="1" presetClass="entr" presetSubtype="0" fill="hold" grpId="0" nodeType="withEffect">
+                                  <p:stCondLst>
+                                    <p:cond delay="0"/>
+                                  </p:stCondLst>
+                                  <p:childTnLst>
+                                    <p:set>
+                                      <p:cBhvr>
+                                        <p:cTn id="14" dur="1" fill="hold">
+                                          <p:stCondLst>
+                                            <p:cond delay="0"/>
+                                          </p:stCondLst>
+                                        </p:cTn>
+                                        <p:tgtEl>
+                                          <p:spTgt spid="6"/>
+                                        </p:tgtEl>
+                                        <p:attrNameLst>
+                                          <p:attrName>style.visibility</p:attrName>
+                                        </p:attrNameLst>
+                                      </p:cBhvr>
+                                      <p:to>
+                                        <p:strVal val="visible"/>
+                                      </p:to>
+                                    </p:set>
+                                  </p:childTnLst>
+                                </p:cTn>
+                              </p:par>
+                            </p:childTnLst>
+                          </p:cTn>
+                        </p:par>
+                      </p:childTnLst>
+                    </p:cTn>
+                  </p:par>
+                </p:childTnLst>
+              </p:cTn>
+              <p:prevCondLst>
+                <p:cond evt="onPrev" delay="0">
+                  <p:tgtEl>
+                    <p:sldTgt/>
+                  </p:tgtEl>
+                </p:cond>
+              </p:prevCondLst>
+              <p:nextCondLst>
+                <p:cond evt="onNext" delay="0">
+                  <p:tgtEl>
+                    <p:sldTgt/>
+                  </p:tgtEl>
+                </p:cond>
+              </p:nextCondLst>
+            </p:seq>
+          </p:childTnLst>
+        </p:cTn>
+      </p:par>
+    </p:tnLst>
+    <p:bldLst>
+      <p:bldP spid="3" grpId="0"/>
+      <p:bldP spid="4" grpId="0"/>
+      <p:bldP spid="5" grpId="0"/>
+      <p:bldP spid="6" grpId="0"/>
     </p:bldLst>
   </p:timing>
 </p:sld>
